--- a/docs/design/recsys_diagram_gnn.pptx
+++ b/docs/design/recsys_diagram_gnn.pptx
@@ -502,7 +502,7 @@
           <a:lstStyle/>
           <a:p>
             <a:r>
-              <a:t>Graph experiment: sasrec-role-graph/v8; aggregation=gnn. A DCGN-inspired recommendation variant, not a reproduction of hierarchical DCGN. X concatenates entity means, role-enriched action means and projected Context, before the Scene MLP and without Title. L2 normalization uses eps=1e-8; cosine weights are clamped at zero, with unit diagonal. D is the diagonal matrix of row sums of A. Similarity is recomputed each forward with gradients enabled. GCN messages use the existing 512-dimensional Scene Residual MLP output. Single scenes receive the self-loop transformation. No temporal convolution, hierarchy, gate, attention, GCN dropout or LayerNorm. BGE stays fixed; projections, role fusion, Scene MLP, GCN and SASRec train jointly. The Baseline, Text path and SASRec retain the existing v7 model structure.</a:t>
+              <a:t>Graph experiment: sasrec-role-graph/v10; aggregation=gnn. A DCGN-inspired recommendation variant, not a reproduction of hierarchical DCGN. X concatenates entity means, role-enriched action means and projected Context, before the Scene MLP and without Title. L2 normalization uses eps=1e-8; cosine weights are clamped at zero, with unit diagonal. D is the diagonal matrix of row sums of A. Similarity is recomputed each forward with gradients enabled. GCN messages use the existing 512-dimensional Scene Residual MLP output. Single scenes receive the self-loop transformation. No temporal convolution, hierarchy, gate, attention or GCN dropout. BGE stays fixed; projections, role fusion, Scene MLP, GCN and SASRec train jointly. Item/Scene residual blocks use x + ReLU(Linear(x)), with one Linear layer. Text uses sasrec-content-v8; mean uses sasrec-role-graph/v9. SASRec and its two-Linear GELU User MLP with LayerNorm remain unchanged.</a:t>
             </a:r>
           </a:p>
         </p:txBody>
@@ -5271,7 +5271,7 @@
                 </a:solidFill>
                 <a:latin typeface="Liberation Sans"/>
               </a:rPr>
-              <a:t>Item Residual MLP</a:t>
+              <a:t>1-layer Item Residual MLP</a:t>
             </a:r>
           </a:p>
           <a:p>
@@ -5290,7 +5290,7 @@
                 </a:solidFill>
                 <a:latin typeface="Liberation Sans"/>
               </a:rPr>
-              <a:t>512 → 512 → 512</a:t>
+              <a:t>512 → 512</a:t>
             </a:r>
           </a:p>
           <a:p>
@@ -5309,7 +5309,7 @@
                 </a:solidFill>
                 <a:latin typeface="Liberation Sans"/>
               </a:rPr>
-              <a:t>ReLU · no LayerNorm</a:t>
+              <a:t>ReLU</a:t>
             </a:r>
           </a:p>
         </p:txBody>
@@ -5661,7 +5661,7 @@
                 </a:solidFill>
                 <a:latin typeface="Liberation Sans"/>
               </a:rPr>
-              <a:t>Item Residual MLP</a:t>
+              <a:t>1-layer Item Residual MLP</a:t>
             </a:r>
           </a:p>
           <a:p>
@@ -5680,7 +5680,7 @@
                 </a:solidFill>
                 <a:latin typeface="Liberation Sans"/>
               </a:rPr>
-              <a:t>512 → 512 → 512</a:t>
+              <a:t>512 → 512</a:t>
             </a:r>
           </a:p>
           <a:p>
@@ -5699,7 +5699,7 @@
                 </a:solidFill>
                 <a:latin typeface="Liberation Sans"/>
               </a:rPr>
-              <a:t>ReLU · no LayerNorm</a:t>
+              <a:t>ReLU</a:t>
             </a:r>
           </a:p>
         </p:txBody>
@@ -8584,7 +8584,7 @@
                 </a:solidFill>
                 <a:latin typeface="Liberation Sans"/>
               </a:rPr>
-              <a:t>Scene Residual MLP → H: S × 512</a:t>
+              <a:t>1-layer Scene Residual MLP → H: S × 512</a:t>
             </a:r>
           </a:p>
           <a:p>
@@ -8603,7 +8603,7 @@
                 </a:solidFill>
                 <a:latin typeface="Liberation Sans"/>
               </a:rPr>
-              <a:t>512 → 512 → 512 · ReLU · no LN</a:t>
+              <a:t>512 → 512 · ReLU</a:t>
             </a:r>
           </a:p>
         </p:txBody>

--- a/docs/design/recsys_diagram_gnn.pptx
+++ b/docs/design/recsys_diagram_gnn.pptx
@@ -502,7 +502,7 @@
           <a:lstStyle/>
           <a:p>
             <a:r>
-              <a:t>Graph experiment: sasrec-role-graph/v10; aggregation=gnn. A DCGN-inspired recommendation variant, not a reproduction of hierarchical DCGN. X concatenates entity means, role-enriched action means and projected Context, before the Scene MLP and without Title. L2 normalization uses eps=1e-8; cosine weights are clamped at zero, with unit diagonal. D is the diagonal matrix of row sums of A. Similarity is recomputed each forward with gradients enabled. GCN messages use the existing 512-dimensional Scene Residual MLP output. Single scenes receive the self-loop transformation. No temporal convolution, hierarchy, gate, attention or GCN dropout. BGE stays fixed; projections, role fusion, Scene MLP, GCN and SASRec train jointly. Item/Scene residual blocks use x + ReLU(Linear(x)), with one Linear layer. Text uses sasrec-content-v8; mean uses sasrec-role-graph/v9. SASRec and its two-Linear GELU User MLP with LayerNorm remain unchanged.</a:t>
+              <a:t>Graph experiment: aggregation=gnn. A DCGN-inspired recommendation variant, not a reproduction of hierarchical DCGN. X concatenates entity means, role-enriched action means and projected Context, before the Scene MLP and without Title. L2 normalization uses eps=1e-8; cosine weights are clamped at zero, with unit diagonal. D is the diagonal matrix of row sums of A. Similarity is recomputed each forward with gradients enabled. GCN messages use the existing 512-dimensional Scene Residual MLP output. Single scenes receive the self-loop transformation. No temporal convolution, hierarchy, gate, attention or GCN dropout. BGE stays fixed; projections, role fusion, Scene MLP, GCN and SASRec train jointly. Item/Scene residual blocks use x + ReLU(Linear(x)), with one Linear layer. SASRec and its two-Linear GELU User MLP with LayerNorm remain unchanged.</a:t>
             </a:r>
           </a:p>
         </p:txBody>
@@ -7569,7 +7569,7 @@
                 </a:solidFill>
                 <a:latin typeface="Liberation Sans"/>
               </a:rPr>
-              <a:t>actor · target · tool · location</a:t>
+              <a:t>actor · target · tool · place</a:t>
             </a:r>
           </a:p>
           <a:p>
